--- a/docs/data_pipeline_slides.pptx
+++ b/docs/data_pipeline_slides.pptx
@@ -35,6 +35,15 @@
     <p:sldId id="283" r:id="rId29"/>
     <p:sldId id="284" r:id="rId30"/>
     <p:sldId id="285" r:id="rId31"/>
+    <p:sldId id="286" r:id="rId32"/>
+    <p:sldId id="287" r:id="rId33"/>
+    <p:sldId id="288" r:id="rId34"/>
+    <p:sldId id="289" r:id="rId35"/>
+    <p:sldId id="290" r:id="rId36"/>
+    <p:sldId id="291" r:id="rId37"/>
+    <p:sldId id="292" r:id="rId38"/>
+    <p:sldId id="293" r:id="rId39"/>
+    <p:sldId id="294" r:id="rId40"/>
   </p:sldIdLst>
   <p:sldSz cx="9144000" cy="5143500" type="screen16x9"/>
   <p:notesSz cx="6858000" cy="9144000"/>
@@ -6171,7 +6180,7 @@
             </a:pPr>
             <a:r>
               <a:rPr/>
-              <a:t>Presentation</a:t>
+              <a:t>Modeling — goals → winners</a:t>
             </a:r>
           </a:p>
         </p:txBody>
@@ -6218,7 +6227,7 @@
             </a:pPr>
             <a:r>
               <a:rPr/>
-              <a:t>Presentation &amp; the daily chain</a:t>
+              <a:t>Goals as the primitive</a:t>
             </a:r>
           </a:p>
         </p:txBody>
@@ -6243,93 +6252,70 @@
             </a:pPr>
             <a:r>
               <a:rPr b="1"/>
-              <a:t>Surfaces:</a:t>
-            </a:r>
-            <a:r>
-              <a:rPr/>
-              <a:t> </a:t>
-            </a:r>
-            <a:r>
-              <a:rPr>
-                <a:latin typeface="Courier"/>
-              </a:rPr>
-              <a:t>wc2026_players.csv</a:t>
-            </a:r>
-            <a:r>
-              <a:rPr/>
-              <a:t>, </a:t>
-            </a:r>
-            <a:r>
-              <a:rPr>
-                <a:latin typeface="Courier"/>
-              </a:rPr>
-              <a:t>wc2026_team_assessment.csv</a:t>
-            </a:r>
-            <a:r>
-              <a:rPr/>
-              <a:t>; </a:t>
-            </a:r>
-            <a:r>
-              <a:rPr>
-                <a:latin typeface="Courier"/>
-              </a:rPr>
-              <a:t>docs/WINNERS.md</a:t>
-            </a:r>
-            <a:r>
-              <a:rPr/>
-              <a:t>, </a:t>
-            </a:r>
-            <a:r>
-              <a:rPr>
-                <a:latin typeface="Courier"/>
-              </a:rPr>
-              <a:t>CHAMPION_TRACKER.md</a:t>
-            </a:r>
-            <a:r>
-              <a:rPr/>
-              <a:t>, </a:t>
-            </a:r>
-            <a:r>
-              <a:rPr>
-                <a:latin typeface="Courier"/>
-              </a:rPr>
-              <a:t>FORECAST_LOG.md</a:t>
-            </a:r>
-            <a:r>
-              <a:rPr/>
-              <a:t>; </a:t>
-            </a:r>
-            <a:r>
-              <a:rPr>
-                <a:latin typeface="Courier"/>
-              </a:rPr>
-              <a:t>artifacts/*.png</a:t>
-            </a:r>
-            <a:r>
-              <a:rPr/>
-              <a:t> (calibration, champion timeline).</a:t>
-            </a:r>
-          </a:p>
-          <a:p>
-            <a:pPr lvl="0" indent="0">
+              <a:t>Generative model</a:t>
+            </a:r>
+            <a:r>
+              <a:rPr/>
+              <a:t> — a hierarchical Bayesian Poisson (Baio–Blangiardo):</a:t>
+            </a:r>
+          </a:p>
+          <a:p>
+            <a:pPr lvl="0"/>
+            <a:r>
+              <a:rPr/>
+              <a:t>home_goals ~ Poisson(λ_h), away_goals ~ Poisson(λ_a)</a:t>
+            </a:r>
+          </a:p>
+          <a:p>
+            <a:pPr lvl="0"/>
+            <a:r>
+              <a:rPr/>
+              <a:t>log λ_h = μ + home_adv + att_h − def_a</a:t>
+            </a:r>
+          </a:p>
+          <a:p>
+            <a:pPr lvl="0"/>
+            <a:r>
+              <a:rPr/>
+              <a:t>log λ_a = μ + att_a − def_h</a:t>
+            </a:r>
+          </a:p>
+          <a:p>
+            <a:pPr lvl="0" indent="0" marL="0">
               <a:buNone/>
             </a:pPr>
             <a:r>
-              <a:rPr>
-                <a:latin typeface="Courier"/>
-              </a:rPr>
-              <a:t>make daily:
-  real-players -&gt; live-squads -&gt; live-features -&gt; real-fit -&gt; elo
-    -&gt; dataset(27) -&gt; winners(28) -&gt; track/champion -&gt; timeline -&gt; log</a:t>
-            </a:r>
-          </a:p>
-          <a:p>
-            <a:pPr lvl="0" indent="0" marL="0">
-              <a:buNone/>
-            </a:pPr>
-            <a:r>
-              <a:rPr/>
-              <a:t>Each run: fresh squads + results → recompute features/prior → refit → rebuild both tables → regenerate every forecast → the CI bot commits the diff.</a:t>
+              <a:rPr/>
+              <a:t>Why this shape:</a:t>
+            </a:r>
+          </a:p>
+          <a:p>
+            <a:pPr lvl="0"/>
+            <a:r>
+              <a:rPr/>
+              <a:t>Rate teams </a:t>
+            </a:r>
+            <a:r>
+              <a:rPr i="1"/>
+              <a:t>individually</a:t>
+            </a:r>
+            <a:r>
+              <a:rPr/>
+              <a:t> (attack/defence), not matchups ⇒ can price fixtures never played (48-team bracket).</a:t>
+            </a:r>
+          </a:p>
+          <a:p>
+            <a:pPr lvl="0"/>
+            <a:r>
+              <a:rPr/>
+              <a:t>Keeps goal margins (a 4–0 says more than a 1–0) — unlike a Bradley–Terry / win-only model.</a:t>
+            </a:r>
+          </a:p>
+          <a:p>
+            <a:pPr lvl="0"/>
+            <a:r>
+              <a:rPr/>
+              <a:t>Bayesian ⇒ every ability carries uncertainty that flows through to the final probabilities.</a:t>
             </a:r>
           </a:p>
         </p:txBody>
@@ -6376,7 +6362,7 @@
             </a:pPr>
             <a:r>
               <a:rPr/>
-              <a:t>Extending it &amp; honest limits</a:t>
+              <a:t>Player prior, pooling &amp; identifiability</a:t>
             </a:r>
           </a:p>
         </p:txBody>
@@ -6396,75 +6382,70 @@
           <a:bodyPr/>
           <a:lstStyle/>
           <a:p>
+            <a:pPr lvl="0" indent="0" marL="0">
+              <a:buNone/>
+            </a:pPr>
+            <a:r>
+              <a:rPr/>
+              <a:t>Effective attack = a learned covariate on the squad prior + a pooled residual:</a:t>
+            </a:r>
+          </a:p>
+          <a:p>
             <a:pPr lvl="0"/>
             <a:r>
               <a:rPr b="1"/>
-              <a:t>Better attributes:</a:t>
-            </a:r>
-            <a:r>
-              <a:rPr/>
-              <a:t> replace the surname join with an exact-ID feed; the PLAYER schema (and everything downstream) is unchanged.</a:t>
+              <a:t>att_eff_t = β_prior · prior_strength_t + att_t</a:t>
             </a:r>
           </a:p>
           <a:p>
             <a:pPr lvl="0"/>
             <a:r>
+              <a:rPr/>
+              <a:t>att_t = σ_att · att_raw_t, att_raw ~ ZeroSumNormal(1)</a:t>
+            </a:r>
+          </a:p>
+          <a:p>
+            <a:pPr lvl="0"/>
+            <a:r>
               <a:rPr b="1"/>
-              <a:t>New prior signal:</a:t>
-            </a:r>
-            <a:r>
-              <a:rPr/>
-              <a:t> add a column in </a:t>
-            </a:r>
-            <a:r>
-              <a:rPr>
-                <a:latin typeface="Courier"/>
-              </a:rPr>
-              <a:t>live_team_features</a:t>
-            </a:r>
-            <a:r>
-              <a:rPr/>
-              <a:t>, fold it into </a:t>
-            </a:r>
-            <a:r>
-              <a:rPr>
-                <a:latin typeface="Courier"/>
-              </a:rPr>
-              <a:t>composite</a:t>
-            </a:r>
-            <a:r>
-              <a:rPr/>
-              <a:t> with a small weight, then </a:t>
-            </a:r>
+              <a:t>β_prior is estimated</a:t>
+            </a:r>
+            <a:r>
+              <a:rPr/>
+              <a:t> — the model learns how much to trust FIFA squad ratings; live fit β_prior ≈ 0.53.</a:t>
+            </a:r>
+          </a:p>
+          <a:p>
+            <a:pPr lvl="0"/>
             <a:r>
               <a:rPr b="1"/>
-              <a:t>validate on the RPS scoreboard</a:t>
-            </a:r>
-            <a:r>
-              <a:rPr/>
-              <a:t> — a feature stays only if it lowers RPS.</a:t>
+              <a:t>Partial pooling</a:t>
+            </a:r>
+            <a:r>
+              <a:rPr/>
+              <a:t> shrinks thin-record teams toward the mean — the principled fix for debutants.</a:t>
             </a:r>
           </a:p>
           <a:p>
             <a:pPr lvl="0"/>
             <a:r>
               <a:rPr b="1"/>
-              <a:t>New source:</a:t>
-            </a:r>
-            <a:r>
-              <a:rPr/>
-              <a:t> add a loader returning a documented schema; wire aliases if names differ.</a:t>
+              <a:t>ZeroSumNormal</a:t>
+            </a:r>
+            <a:r>
+              <a:rPr/>
+              <a:t> pins abilities to average zero; μ absorbs the overall scoring level (identifiability).</a:t>
             </a:r>
           </a:p>
           <a:p>
             <a:pPr lvl="0"/>
             <a:r>
               <a:rPr b="1"/>
-              <a:t>Limits:</a:t>
-            </a:r>
-            <a:r>
-              <a:rPr/>
-              <a:t> ~70% surname-join coverage (flagged), FIFA-22 vintage, results feed lags real time by hours.</a:t>
+              <a:t>Recency-weighted likelihood:</a:t>
+            </a:r>
+            <a:r>
+              <a:rPr/>
+              <a:t> exponential decay (half-life ~540 d) so current squads count more.</a:t>
             </a:r>
           </a:p>
         </p:txBody>
@@ -6577,6 +6558,1326 @@
 </file>
 
 <file path=ppt/slides/slide30.xml><?xml version="1.0" encoding="utf-8"?>
+<p:sld xmlns:a="http://schemas.openxmlformats.org/drawingml/2006/main" xmlns:r="http://schemas.openxmlformats.org/officeDocument/2006/relationships" xmlns:p="http://schemas.openxmlformats.org/presentationml/2006/main">
+  <p:cSld>
+    <p:spTree>
+      <p:nvGrpSpPr>
+        <p:cNvPr id="1" name=""/>
+        <p:cNvGrpSpPr/>
+        <p:nvPr/>
+      </p:nvGrpSpPr>
+      <p:grpSpPr>
+        <a:xfrm>
+          <a:off x="0" y="0"/>
+          <a:ext cx="0" cy="0"/>
+          <a:chOff x="0" y="0"/>
+          <a:chExt cx="0" cy="0"/>
+        </a:xfrm>
+      </p:grpSpPr>
+      <p:sp>
+        <p:nvSpPr>
+          <p:cNvPr id="2" name="Title 1"/>
+          <p:cNvSpPr>
+            <a:spLocks noGrp="1"/>
+          </p:cNvSpPr>
+          <p:nvPr>
+            <p:ph type="title"/>
+          </p:nvPr>
+        </p:nvSpPr>
+        <p:spPr/>
+        <p:txBody>
+          <a:bodyPr/>
+          <a:lstStyle/>
+          <a:p>
+            <a:pPr lvl="0" indent="0" marL="0">
+              <a:buNone/>
+            </a:pPr>
+            <a:r>
+              <a:rPr/>
+              <a:t>Inference — NUTS &amp; the funnel</a:t>
+            </a:r>
+          </a:p>
+        </p:txBody>
+      </p:sp>
+      <p:sp>
+        <p:nvSpPr>
+          <p:cNvPr id="3" name="Content Placeholder 2"/>
+          <p:cNvSpPr>
+            <a:spLocks noGrp="1"/>
+          </p:cNvSpPr>
+          <p:nvPr>
+            <p:ph idx="1"/>
+          </p:nvPr>
+        </p:nvSpPr>
+        <p:spPr/>
+        <p:txBody>
+          <a:bodyPr/>
+          <a:lstStyle/>
+          <a:p>
+            <a:pPr lvl="0" indent="0" marL="0">
+              <a:buNone/>
+            </a:pPr>
+            <a:r>
+              <a:rPr/>
+              <a:t>Fit with PyMC / NUTS (4 chains) on 586 real results (2022→cutoff, 48 teams).</a:t>
+            </a:r>
+          </a:p>
+          <a:p>
+            <a:pPr lvl="0"/>
+            <a:r>
+              <a:rPr b="1"/>
+              <a:t>Reproducibility note:</a:t>
+            </a:r>
+            <a:r>
+              <a:rPr/>
+              <a:t> the first (centered) parameterization produced the classic </a:t>
+            </a:r>
+            <a:r>
+              <a:rPr i="1"/>
+              <a:t>funnel</a:t>
+            </a:r>
+            <a:r>
+              <a:rPr/>
+              <a:t> — σ_att → 0, R̂ ≈ 1.6, ESS in single digits; raising </a:t>
+            </a:r>
+            <a:r>
+              <a:rPr>
+                <a:latin typeface="Courier"/>
+              </a:rPr>
+              <a:t>target_accept</a:t>
+            </a:r>
+            <a:r>
+              <a:rPr/>
+              <a:t> made it </a:t>
+            </a:r>
+            <a:r>
+              <a:rPr i="1"/>
+              <a:t>worse</a:t>
+            </a:r>
+            <a:r>
+              <a:rPr/>
+              <a:t>.</a:t>
+            </a:r>
+          </a:p>
+          <a:p>
+            <a:pPr lvl="0"/>
+            <a:r>
+              <a:rPr b="1"/>
+              <a:t>Fix:</a:t>
+            </a:r>
+            <a:r>
+              <a:rPr/>
+              <a:t> the non-centered form above (sample standardized offsets, scale by σ separately) ⇒ R̂ ≈ 1.0, ESS up ~100×.</a:t>
+            </a:r>
+          </a:p>
+          <a:p>
+            <a:pPr lvl="0"/>
+            <a:r>
+              <a:rPr/>
+              <a:t>Diagnostics gate: R̂ &lt; 1.01, no divergences, healthy ESS.</a:t>
+            </a:r>
+          </a:p>
+          <a:p>
+            <a:pPr lvl="0" indent="0" marL="0">
+              <a:buNone/>
+            </a:pPr>
+            <a:r>
+              <a:rPr/>
+              <a:t>The canonical hierarchical pathology — and its canonical cure.</a:t>
+            </a:r>
+          </a:p>
+        </p:txBody>
+      </p:sp>
+    </p:spTree>
+  </p:cSld>
+</p:sld>
+</file>
+
+<file path=ppt/slides/slide31.xml><?xml version="1.0" encoding="utf-8"?>
+<p:sld xmlns:a="http://schemas.openxmlformats.org/drawingml/2006/main" xmlns:r="http://schemas.openxmlformats.org/officeDocument/2006/relationships" xmlns:p="http://schemas.openxmlformats.org/presentationml/2006/main">
+  <p:cSld>
+    <p:spTree>
+      <p:nvGrpSpPr>
+        <p:cNvPr id="1" name=""/>
+        <p:cNvGrpSpPr/>
+        <p:nvPr/>
+      </p:nvGrpSpPr>
+      <p:grpSpPr>
+        <a:xfrm>
+          <a:off x="0" y="0"/>
+          <a:ext cx="0" cy="0"/>
+          <a:chOff x="0" y="0"/>
+          <a:chExt cx="0" cy="0"/>
+        </a:xfrm>
+      </p:grpSpPr>
+      <p:sp>
+        <p:nvSpPr>
+          <p:cNvPr id="2" name="Title 1"/>
+          <p:cNvSpPr>
+            <a:spLocks noGrp="1"/>
+          </p:cNvSpPr>
+          <p:nvPr>
+            <p:ph type="title"/>
+          </p:nvPr>
+        </p:nvSpPr>
+        <p:spPr/>
+        <p:txBody>
+          <a:bodyPr/>
+          <a:lstStyle/>
+          <a:p>
+            <a:pPr lvl="0" indent="0" marL="0">
+              <a:buNone/>
+            </a:pPr>
+            <a:r>
+              <a:rPr/>
+              <a:t>From goals to winners</a:t>
+            </a:r>
+          </a:p>
+        </p:txBody>
+      </p:sp>
+      <p:sp>
+        <p:nvSpPr>
+          <p:cNvPr id="3" name="Content Placeholder 2"/>
+          <p:cNvSpPr>
+            <a:spLocks noGrp="1"/>
+          </p:cNvSpPr>
+          <p:nvPr>
+            <p:ph idx="1"/>
+          </p:nvPr>
+        </p:nvSpPr>
+        <p:spPr/>
+        <p:txBody>
+          <a:bodyPr/>
+          <a:lstStyle/>
+          <a:p>
+            <a:pPr lvl="0" indent="0" marL="0">
+              <a:buNone/>
+            </a:pPr>
+            <a:r>
+              <a:rPr/>
+              <a:t>Two derived layers, both just sums / simulations over the scoreline distribution:</a:t>
+            </a:r>
+          </a:p>
+          <a:p>
+            <a:pPr lvl="0" indent="-342900" marL="342900">
+              <a:buAutoNum type="arabicPeriod"/>
+            </a:pPr>
+            <a:r>
+              <a:rPr b="1"/>
+              <a:t>Per match</a:t>
+            </a:r>
+            <a:r>
+              <a:rPr/>
+              <a:t> (</a:t>
+            </a:r>
+            <a:r>
+              <a:rPr>
+                <a:latin typeface="Courier"/>
+              </a:rPr>
+              <a:t>predict_match</a:t>
+            </a:r>
+            <a:r>
+              <a:rPr/>
+              <a:t>): for </a:t>
+            </a:r>
+            <a:r>
+              <a:rPr i="1"/>
+              <a:t>every</a:t>
+            </a:r>
+            <a:r>
+              <a:rPr/>
+              <a:t> posterior draw form λ = exp(μ [+home_adv] + att_eff − def), build the Poisson scoreline matrix, average over draws (</a:t>
+            </a:r>
+            <a:r>
+              <a:rPr i="1"/>
+              <a:t>posterior-predictive</a:t>
+            </a:r>
+            <a:r>
+              <a:rPr/>
+              <a:t>). Read off 1X2 = P(home)/P(draw)/P(away), most-likely score, over/under 2.5, both-teams-score.</a:t>
+            </a:r>
+          </a:p>
+          <a:p>
+            <a:pPr lvl="0" indent="-342900" marL="342900">
+              <a:buAutoNum type="arabicPeriod"/>
+            </a:pPr>
+            <a:r>
+              <a:rPr b="1"/>
+              <a:t>Whole tournament</a:t>
+            </a:r>
+            <a:r>
+              <a:rPr/>
+              <a:t> (Monte-Carlo): draw a full parameter set per simulated tournament, run the real 12-group → knockout structure, </a:t>
+            </a:r>
+            <a:r>
+              <a:rPr b="1"/>
+              <a:t>holding played games fixed</a:t>
+            </a:r>
+            <a:r>
+              <a:rPr/>
+              <a:t>. Aggregate ⇒ each team’s P(advance) … P(champion).</a:t>
+            </a:r>
+          </a:p>
+          <a:p>
+            <a:pPr lvl="0" indent="0" marL="0">
+              <a:buNone/>
+            </a:pPr>
+            <a:r>
+              <a:rPr/>
+              <a:t>Parameter uncertainty propagates into the headline odds.</a:t>
+            </a:r>
+          </a:p>
+        </p:txBody>
+      </p:sp>
+    </p:spTree>
+  </p:cSld>
+</p:sld>
+</file>
+
+<file path=ppt/slides/slide32.xml><?xml version="1.0" encoding="utf-8"?>
+<p:sld xmlns:a="http://schemas.openxmlformats.org/drawingml/2006/main" xmlns:r="http://schemas.openxmlformats.org/officeDocument/2006/relationships" xmlns:p="http://schemas.openxmlformats.org/presentationml/2006/main">
+  <p:cSld>
+    <p:spTree>
+      <p:nvGrpSpPr>
+        <p:cNvPr id="1" name=""/>
+        <p:cNvGrpSpPr/>
+        <p:nvPr/>
+      </p:nvGrpSpPr>
+      <p:grpSpPr>
+        <a:xfrm>
+          <a:off x="0" y="0"/>
+          <a:ext cx="0" cy="0"/>
+          <a:chOff x="0" y="0"/>
+          <a:chExt cx="0" cy="0"/>
+        </a:xfrm>
+      </p:grpSpPr>
+      <p:sp>
+        <p:nvSpPr>
+          <p:cNvPr id="2" name="Title 1"/>
+          <p:cNvSpPr>
+            <a:spLocks noGrp="1"/>
+          </p:cNvSpPr>
+          <p:nvPr>
+            <p:ph type="title"/>
+          </p:nvPr>
+        </p:nvSpPr>
+        <p:spPr/>
+        <p:txBody>
+          <a:bodyPr/>
+          <a:lstStyle/>
+          <a:p>
+            <a:pPr lvl="0" indent="0" marL="0">
+              <a:buNone/>
+            </a:pPr>
+            <a:r>
+              <a:rPr/>
+              <a:t>Cross-checks — Elo &amp; LLM-as-a-Judge</a:t>
+            </a:r>
+          </a:p>
+        </p:txBody>
+      </p:sp>
+      <p:sp>
+        <p:nvSpPr>
+          <p:cNvPr id="3" name="Content Placeholder 2"/>
+          <p:cNvSpPr>
+            <a:spLocks noGrp="1"/>
+          </p:cNvSpPr>
+          <p:nvPr>
+            <p:ph idx="1"/>
+          </p:nvPr>
+        </p:nvSpPr>
+        <p:spPr/>
+        <p:txBody>
+          <a:bodyPr/>
+          <a:lstStyle/>
+          <a:p>
+            <a:pPr lvl="0"/>
+            <a:r>
+              <a:rPr b="1"/>
+              <a:t>Elo</a:t>
+            </a:r>
+            <a:r>
+              <a:rPr/>
+              <a:t> (recency-weighted): R’ = R + K·G·(W − E), K larger for World Cups, G a goal-diff multiplier. Sequential ⇒ “who is hot now”; also drives the fast timeline / scorecard simulator.</a:t>
+            </a:r>
+          </a:p>
+          <a:p>
+            <a:pPr lvl="0"/>
+            <a:r>
+              <a:rPr b="1"/>
+              <a:t>LLM-as-a-Judge:</a:t>
+            </a:r>
+            <a:r>
+              <a:rPr/>
+              <a:t> fuses both ratings + form + venue into a calibrated 1X2 for a single fixture (Elo fallback with no API key).</a:t>
+            </a:r>
+          </a:p>
+          <a:p>
+            <a:pPr lvl="0"/>
+            <a:r>
+              <a:rPr b="1"/>
+              <a:t>Disagreement = signal:</a:t>
+            </a:r>
+            <a:r>
+              <a:rPr/>
+              <a:t> pooled Bayesian ranks Mexico 20th, Elo 7th — the gap localizes where the data is least certain.</a:t>
+            </a:r>
+          </a:p>
+        </p:txBody>
+      </p:sp>
+    </p:spTree>
+  </p:cSld>
+</p:sld>
+</file>
+
+<file path=ppt/slides/slide33.xml><?xml version="1.0" encoding="utf-8"?>
+<p:sld xmlns:a="http://schemas.openxmlformats.org/drawingml/2006/main" xmlns:r="http://schemas.openxmlformats.org/officeDocument/2006/relationships" xmlns:p="http://schemas.openxmlformats.org/presentationml/2006/main">
+  <p:cSld>
+    <p:spTree>
+      <p:nvGrpSpPr>
+        <p:cNvPr id="1" name=""/>
+        <p:cNvGrpSpPr/>
+        <p:nvPr/>
+      </p:nvGrpSpPr>
+      <p:grpSpPr>
+        <a:xfrm>
+          <a:off x="0" y="0"/>
+          <a:ext cx="0" cy="0"/>
+          <a:chOff x="0" y="0"/>
+          <a:chExt cx="0" cy="0"/>
+        </a:xfrm>
+      </p:grpSpPr>
+      <p:sp>
+        <p:nvSpPr>
+          <p:cNvPr id="2" name="Title 1"/>
+          <p:cNvSpPr>
+            <a:spLocks noGrp="1"/>
+          </p:cNvSpPr>
+          <p:nvPr>
+            <p:ph type="title"/>
+          </p:nvPr>
+        </p:nvSpPr>
+        <p:spPr>
+          <a:xfrm>
+            <a:off x="457201" y="204787"/>
+            <a:ext cx="3008313" cy="871538"/>
+          </a:xfrm>
+        </p:spPr>
+        <p:txBody>
+          <a:bodyPr/>
+          <a:lstStyle/>
+          <a:p>
+            <a:pPr lvl="0" indent="0" marL="0">
+              <a:buNone/>
+            </a:pPr>
+            <a:r>
+              <a:rPr/>
+              <a:t>Results — the scoreboard (RPS ↓)</a:t>
+            </a:r>
+          </a:p>
+        </p:txBody>
+      </p:sp>
+      <p:sp>
+        <p:nvSpPr>
+          <p:cNvPr id="4" name="Text Placeholder 3"/>
+          <p:cNvSpPr>
+            <a:spLocks noGrp="1"/>
+          </p:cNvSpPr>
+          <p:nvPr>
+            <p:ph idx="2" sz="half" type="body"/>
+          </p:nvPr>
+        </p:nvSpPr>
+        <p:spPr/>
+        <p:txBody>
+          <a:bodyPr/>
+          <a:lstStyle/>
+          <a:p>
+            <a:pPr lvl="0" indent="0" marL="0">
+              <a:buNone/>
+            </a:pPr>
+            <a:r>
+              <a:rPr/>
+              <a:t>Out-of-sample: fit on the 4 years before each tournament, scored on its matches.</a:t>
+            </a:r>
+          </a:p>
+        </p:txBody>
+      </p:sp>
+      <p:graphicFrame>
+        <p:nvGraphicFramePr>
+          <p:cNvPr id="6" name="Content Placeholder 5"/>
+          <p:cNvGraphicFramePr>
+            <a:graphicFrameLocks noGrp="1"/>
+          </p:cNvGraphicFramePr>
+          <p:nvPr>
+            <p:ph idx="1"/>
+          </p:nvPr>
+        </p:nvGraphicFramePr>
+        <p:xfrm>
+          <a:off x="3568700" y="203200"/>
+          <a:ext cx="5105400" cy="4381500"/>
+        </p:xfrm>
+        <a:graphic>
+          <a:graphicData uri="http://schemas.openxmlformats.org/drawingml/2006/table">
+            <a:tbl>
+              <a:tblPr firstRow="1" bandRow="1">
+                <a:tableStyleId>{5C22544A-7EE6-4342-B048-85BDC9FD1C3A}</a:tableStyleId>
+              </a:tblPr>
+              <a:tblGrid>
+                <a:gridCol w="1270000"/>
+                <a:gridCol w="1270000"/>
+                <a:gridCol w="1270000"/>
+                <a:gridCol w="1270000"/>
+              </a:tblGrid>
+              <a:tr h="0">
+                <a:tc>
+                  <a:txBody>
+                    <a:bodyPr/>
+                    <a:lstStyle/>
+                    <a:p>
+                      <a:pPr lvl="0" indent="0" marL="0">
+                        <a:buNone/>
+                      </a:pPr>
+                      <a:r>
+                        <a:rPr/>
+                        <a:t>Model</a:t>
+                      </a:r>
+                    </a:p>
+                  </a:txBody>
+                  <a:tcPr/>
+                </a:tc>
+                <a:tc>
+                  <a:txBody>
+                    <a:bodyPr/>
+                    <a:lstStyle/>
+                    <a:p>
+                      <a:pPr lvl="0" indent="0" marL="0">
+                        <a:buNone/>
+                      </a:pPr>
+                      <a:r>
+                        <a:rPr/>
+                        <a:t>WC 2018</a:t>
+                      </a:r>
+                    </a:p>
+                  </a:txBody>
+                  <a:tcPr/>
+                </a:tc>
+                <a:tc>
+                  <a:txBody>
+                    <a:bodyPr/>
+                    <a:lstStyle/>
+                    <a:p>
+                      <a:pPr lvl="0" indent="0" marL="0">
+                        <a:buNone/>
+                      </a:pPr>
+                      <a:r>
+                        <a:rPr/>
+                        <a:t>WC 2022</a:t>
+                      </a:r>
+                    </a:p>
+                  </a:txBody>
+                  <a:tcPr/>
+                </a:tc>
+                <a:tc>
+                  <a:txBody>
+                    <a:bodyPr/>
+                    <a:lstStyle/>
+                    <a:p>
+                      <a:pPr lvl="0" indent="0" marL="0">
+                        <a:buNone/>
+                      </a:pPr>
+                      <a:r>
+                        <a:rPr/>
+                        <a:t>WC 2026*</a:t>
+                      </a:r>
+                    </a:p>
+                  </a:txBody>
+                  <a:tcPr/>
+                </a:tc>
+              </a:tr>
+              <a:tr h="0">
+                <a:tc>
+                  <a:txBody>
+                    <a:bodyPr/>
+                    <a:lstStyle/>
+                    <a:p>
+                      <a:pPr lvl="0" indent="0" marL="0">
+                        <a:buNone/>
+                      </a:pPr>
+                      <a:r>
+                        <a:rPr b="1"/>
+                        <a:t>Bayesian</a:t>
+                      </a:r>
+                    </a:p>
+                  </a:txBody>
+                </a:tc>
+                <a:tc>
+                  <a:txBody>
+                    <a:bodyPr/>
+                    <a:lstStyle/>
+                    <a:p>
+                      <a:pPr lvl="0" indent="0" marL="0">
+                        <a:buNone/>
+                      </a:pPr>
+                      <a:r>
+                        <a:rPr b="1"/>
+                        <a:t>0.213</a:t>
+                      </a:r>
+                    </a:p>
+                  </a:txBody>
+                </a:tc>
+                <a:tc>
+                  <a:txBody>
+                    <a:bodyPr/>
+                    <a:lstStyle/>
+                    <a:p>
+                      <a:pPr lvl="0" indent="0" marL="0">
+                        <a:buNone/>
+                      </a:pPr>
+                      <a:r>
+                        <a:rPr b="1"/>
+                        <a:t>0.216</a:t>
+                      </a:r>
+                    </a:p>
+                  </a:txBody>
+                </a:tc>
+                <a:tc>
+                  <a:txBody>
+                    <a:bodyPr/>
+                    <a:lstStyle/>
+                    <a:p>
+                      <a:pPr lvl="0" indent="0" marL="0">
+                        <a:buNone/>
+                      </a:pPr>
+                      <a:r>
+                        <a:rPr b="1"/>
+                        <a:t>0.180</a:t>
+                      </a:r>
+                    </a:p>
+                  </a:txBody>
+                </a:tc>
+              </a:tr>
+              <a:tr h="0">
+                <a:tc>
+                  <a:txBody>
+                    <a:bodyPr/>
+                    <a:lstStyle/>
+                    <a:p>
+                      <a:pPr lvl="0" indent="0" marL="0">
+                        <a:buNone/>
+                      </a:pPr>
+                      <a:r>
+                        <a:rPr/>
+                        <a:t>Elo (baseline)</a:t>
+                      </a:r>
+                    </a:p>
+                  </a:txBody>
+                </a:tc>
+                <a:tc>
+                  <a:txBody>
+                    <a:bodyPr/>
+                    <a:lstStyle/>
+                    <a:p>
+                      <a:pPr lvl="0" indent="0" marL="0">
+                        <a:buNone/>
+                      </a:pPr>
+                      <a:r>
+                        <a:rPr/>
+                        <a:t>0.215</a:t>
+                      </a:r>
+                    </a:p>
+                  </a:txBody>
+                </a:tc>
+                <a:tc>
+                  <a:txBody>
+                    <a:bodyPr/>
+                    <a:lstStyle/>
+                    <a:p>
+                      <a:pPr lvl="0" indent="0" marL="0">
+                        <a:buNone/>
+                      </a:pPr>
+                      <a:r>
+                        <a:rPr/>
+                        <a:t>0.217</a:t>
+                      </a:r>
+                    </a:p>
+                  </a:txBody>
+                </a:tc>
+                <a:tc>
+                  <a:txBody>
+                    <a:bodyPr/>
+                    <a:lstStyle/>
+                    <a:p>
+                      <a:pPr lvl="0" indent="0" marL="0">
+                        <a:buNone/>
+                      </a:pPr>
+                      <a:r>
+                        <a:rPr/>
+                        <a:t>0.201</a:t>
+                      </a:r>
+                    </a:p>
+                  </a:txBody>
+                </a:tc>
+              </a:tr>
+              <a:tr h="0">
+                <a:tc>
+                  <a:txBody>
+                    <a:bodyPr/>
+                    <a:lstStyle/>
+                    <a:p>
+                      <a:pPr lvl="0" indent="0" marL="0">
+                        <a:buNone/>
+                      </a:pPr>
+                      <a:r>
+                        <a:rPr/>
+                        <a:t>Naive base-rate</a:t>
+                      </a:r>
+                    </a:p>
+                  </a:txBody>
+                </a:tc>
+                <a:tc>
+                  <a:txBody>
+                    <a:bodyPr/>
+                    <a:lstStyle/>
+                    <a:p>
+                      <a:pPr lvl="0" indent="0" marL="0">
+                        <a:buNone/>
+                      </a:pPr>
+                      <a:r>
+                        <a:rPr/>
+                        <a:t>0.249</a:t>
+                      </a:r>
+                    </a:p>
+                  </a:txBody>
+                </a:tc>
+                <a:tc>
+                  <a:txBody>
+                    <a:bodyPr/>
+                    <a:lstStyle/>
+                    <a:p>
+                      <a:pPr lvl="0" indent="0" marL="0">
+                        <a:buNone/>
+                      </a:pPr>
+                      <a:r>
+                        <a:rPr/>
+                        <a:t>0.235</a:t>
+                      </a:r>
+                    </a:p>
+                  </a:txBody>
+                </a:tc>
+                <a:tc>
+                  <a:txBody>
+                    <a:bodyPr/>
+                    <a:lstStyle/>
+                    <a:p>
+                      <a:pPr lvl="0" indent="0" marL="0">
+                        <a:buNone/>
+                      </a:pPr>
+                      <a:r>
+                        <a:rPr/>
+                        <a:t>0.191</a:t>
+                      </a:r>
+                    </a:p>
+                  </a:txBody>
+                </a:tc>
+              </a:tr>
+            </a:tbl>
+          </a:graphicData>
+        </a:graphic>
+      </p:graphicFrame>
+    </p:spTree>
+  </p:cSld>
+</p:sld>
+</file>
+
+<file path=ppt/slides/slide34.xml><?xml version="1.0" encoding="utf-8"?>
+<p:sld xmlns:a="http://schemas.openxmlformats.org/drawingml/2006/main" xmlns:r="http://schemas.openxmlformats.org/officeDocument/2006/relationships" xmlns:p="http://schemas.openxmlformats.org/presentationml/2006/main">
+  <p:cSld>
+    <p:spTree>
+      <p:nvGrpSpPr>
+        <p:cNvPr id="1" name=""/>
+        <p:cNvGrpSpPr/>
+        <p:nvPr/>
+      </p:nvGrpSpPr>
+      <p:grpSpPr>
+        <a:xfrm>
+          <a:off x="0" y="0"/>
+          <a:ext cx="0" cy="0"/>
+          <a:chOff x="0" y="0"/>
+          <a:chExt cx="0" cy="0"/>
+        </a:xfrm>
+      </p:grpSpPr>
+      <p:sp>
+        <p:nvSpPr>
+          <p:cNvPr id="3" name="Content Placeholder 2"/>
+          <p:cNvSpPr>
+            <a:spLocks noGrp="1"/>
+          </p:cNvSpPr>
+          <p:nvPr>
+            <p:ph idx="1"/>
+          </p:nvPr>
+        </p:nvSpPr>
+        <p:spPr/>
+        <p:txBody>
+          <a:bodyPr/>
+          <a:lstStyle/>
+          <a:p>
+            <a:pPr lvl="0" indent="0" marL="0">
+              <a:buNone/>
+            </a:pPr>
+            <a:r>
+              <a:rPr/>
+              <a:t>RPS = the football-standard ordinal score (a win-vs-draw miss hurts less than win-vs-loss); lower is better. The Bayesian model beats both baselines in every tournament. *2026 in-progress (directional). </a:t>
+            </a:r>
+            <a:r>
+              <a:rPr b="1"/>
+              <a:t>Any new feature must lower RPS here to ship.</a:t>
+            </a:r>
+          </a:p>
+        </p:txBody>
+      </p:sp>
+    </p:spTree>
+  </p:cSld>
+</p:sld>
+</file>
+
+<file path=ppt/slides/slide35.xml><?xml version="1.0" encoding="utf-8"?>
+<p:sld xmlns:a="http://schemas.openxmlformats.org/drawingml/2006/main" xmlns:r="http://schemas.openxmlformats.org/officeDocument/2006/relationships" xmlns:p="http://schemas.openxmlformats.org/presentationml/2006/main">
+  <p:cSld>
+    <p:spTree>
+      <p:nvGrpSpPr>
+        <p:cNvPr id="1" name=""/>
+        <p:cNvGrpSpPr/>
+        <p:nvPr/>
+      </p:nvGrpSpPr>
+      <p:grpSpPr>
+        <a:xfrm>
+          <a:off x="0" y="0"/>
+          <a:ext cx="0" cy="0"/>
+          <a:chOff x="0" y="0"/>
+          <a:chExt cx="0" cy="0"/>
+        </a:xfrm>
+      </p:grpSpPr>
+      <p:sp>
+        <p:nvSpPr>
+          <p:cNvPr id="2" name="Title 1"/>
+          <p:cNvSpPr>
+            <a:spLocks noGrp="1"/>
+          </p:cNvSpPr>
+          <p:nvPr>
+            <p:ph type="title"/>
+          </p:nvPr>
+        </p:nvSpPr>
+        <p:spPr/>
+        <p:txBody>
+          <a:bodyPr/>
+          <a:lstStyle/>
+          <a:p>
+            <a:pPr lvl="0" indent="0" marL="0">
+              <a:buNone/>
+            </a:pPr>
+            <a:r>
+              <a:rPr/>
+              <a:t>Results — what actually moved the score</a:t>
+            </a:r>
+          </a:p>
+        </p:txBody>
+      </p:sp>
+      <p:sp>
+        <p:nvSpPr>
+          <p:cNvPr id="3" name="Content Placeholder 2"/>
+          <p:cNvSpPr>
+            <a:spLocks noGrp="1"/>
+          </p:cNvSpPr>
+          <p:nvPr>
+            <p:ph idx="1"/>
+          </p:nvPr>
+        </p:nvSpPr>
+        <p:spPr/>
+        <p:txBody>
+          <a:bodyPr/>
+          <a:lstStyle/>
+          <a:p>
+            <a:pPr lvl="0"/>
+            <a:r>
+              <a:rPr b="1"/>
+              <a:t>Expected goals beat actual goals:</a:t>
+            </a:r>
+            <a:r>
+              <a:rPr/>
+              <a:t> on 2018/2022 StatsBomb xG, the xG-fit model wins on RPS (</a:t>
+            </a:r>
+            <a:r>
+              <a:rPr b="1"/>
+              <a:t>0.2294</a:t>
+            </a:r>
+            <a:r>
+              <a:rPr/>
+              <a:t> vs 0.2319) — chance </a:t>
+            </a:r>
+            <a:r>
+              <a:rPr i="1"/>
+              <a:t>quality</a:t>
+            </a:r>
+            <a:r>
+              <a:rPr/>
+              <a:t> is a steadier signal than noisy goals.</a:t>
+            </a:r>
+          </a:p>
+          <a:p>
+            <a:pPr lvl="0"/>
+            <a:r>
+              <a:rPr b="1"/>
+              <a:t>Form helps — but only the right kind:</a:t>
+            </a:r>
+            <a:r>
+              <a:rPr/>
+              <a:t> conditioning on recent </a:t>
+            </a:r>
+            <a:r>
+              <a:rPr i="1"/>
+              <a:t>shots-on-target</a:t>
+            </a:r>
+            <a:r>
+              <a:rPr/>
+              <a:t> is the single best variant (RPS </a:t>
+            </a:r>
+            <a:r>
+              <a:rPr b="1"/>
+              <a:t>0.2231</a:t>
+            </a:r>
+            <a:r>
+              <a:rPr/>
+              <a:t>); conditioning on recent </a:t>
+            </a:r>
+            <a:r>
+              <a:rPr i="1"/>
+              <a:t>goals</a:t>
+            </a:r>
+            <a:r>
+              <a:rPr/>
+              <a:t> makes it </a:t>
+            </a:r>
+            <a:r>
+              <a:rPr i="1"/>
+              <a:t>worse</a:t>
+            </a:r>
+            <a:r>
+              <a:rPr/>
+              <a:t> (0.2345).</a:t>
+            </a:r>
+          </a:p>
+          <a:p>
+            <a:pPr lvl="0"/>
+            <a:r>
+              <a:rPr b="1"/>
+              <a:t>Calibration:</a:t>
+            </a:r>
+            <a:r>
+              <a:rPr/>
+              <a:t> the reliability curve hugs the diagonal — probabilities are honest, not just confident.</a:t>
+            </a:r>
+          </a:p>
+          <a:p>
+            <a:pPr lvl="0"/>
+            <a:r>
+              <a:rPr b="1"/>
+              <a:t>Live self-grading</a:t>
+            </a:r>
+            <a:r>
+              <a:rPr/>
+              <a:t> (resolved 2026 matches): outcome hit-rate </a:t>
+            </a:r>
+            <a:r>
+              <a:rPr b="1"/>
+              <a:t>65%</a:t>
+            </a:r>
+            <a:r>
+              <a:rPr/>
+              <a:t>, RPS </a:t>
+            </a:r>
+            <a:r>
+              <a:rPr b="1"/>
+              <a:t>0.165</a:t>
+            </a:r>
+            <a:r>
+              <a:rPr/>
+              <a:t>, goal-total MAE 1.43 — refreshed daily in </a:t>
+            </a:r>
+            <a:r>
+              <a:rPr>
+                <a:latin typeface="Courier"/>
+              </a:rPr>
+              <a:t>FORECAST_LOG.md</a:t>
+            </a:r>
+            <a:r>
+              <a:rPr/>
+              <a:t>.</a:t>
+            </a:r>
+          </a:p>
+          <a:p>
+            <a:pPr lvl="0"/>
+            <a:r>
+              <a:rPr b="1"/>
+              <a:t>Discipline:</a:t>
+            </a:r>
+            <a:r>
+              <a:rPr/>
+              <a:t> spatial-style &amp; social-sentiment features barely moved RPS ⇒ kept, but clearly labelled exploratory.</a:t>
+            </a:r>
+          </a:p>
+        </p:txBody>
+      </p:sp>
+    </p:spTree>
+  </p:cSld>
+</p:sld>
+</file>
+
+<file path=ppt/slides/slide36.xml><?xml version="1.0" encoding="utf-8"?>
+<p:sld xmlns:a="http://schemas.openxmlformats.org/drawingml/2006/main" xmlns:r="http://schemas.openxmlformats.org/officeDocument/2006/relationships" xmlns:p="http://schemas.openxmlformats.org/presentationml/2006/main">
+  <p:cSld>
+    <p:spTree>
+      <p:nvGrpSpPr>
+        <p:cNvPr id="1" name=""/>
+        <p:cNvGrpSpPr/>
+        <p:nvPr/>
+      </p:nvGrpSpPr>
+      <p:grpSpPr>
+        <a:xfrm>
+          <a:off x="0" y="0"/>
+          <a:ext cx="0" cy="0"/>
+          <a:chOff x="0" y="0"/>
+          <a:chExt cx="0" cy="0"/>
+        </a:xfrm>
+      </p:grpSpPr>
+      <p:sp>
+        <p:nvSpPr>
+          <p:cNvPr id="2" name="Title 1"/>
+          <p:cNvSpPr>
+            <a:spLocks noGrp="1"/>
+          </p:cNvSpPr>
+          <p:nvPr>
+            <p:ph type="title"/>
+          </p:nvPr>
+        </p:nvSpPr>
+        <p:spPr>
+          <a:xfrm>
+            <a:off x="722313" y="3305176"/>
+            <a:ext cx="7772400" cy="1021556"/>
+          </a:xfrm>
+        </p:spPr>
+        <p:txBody>
+          <a:bodyPr/>
+          <a:lstStyle/>
+          <a:p>
+            <a:pPr lvl="0" indent="0" marL="0">
+              <a:buNone/>
+            </a:pPr>
+            <a:r>
+              <a:rPr/>
+              <a:t>Presentation</a:t>
+            </a:r>
+          </a:p>
+        </p:txBody>
+      </p:sp>
+    </p:spTree>
+  </p:cSld>
+</p:sld>
+</file>
+
+<file path=ppt/slides/slide37.xml><?xml version="1.0" encoding="utf-8"?>
+<p:sld xmlns:a="http://schemas.openxmlformats.org/drawingml/2006/main" xmlns:r="http://schemas.openxmlformats.org/officeDocument/2006/relationships" xmlns:p="http://schemas.openxmlformats.org/presentationml/2006/main">
+  <p:cSld>
+    <p:spTree>
+      <p:nvGrpSpPr>
+        <p:cNvPr id="1" name=""/>
+        <p:cNvGrpSpPr/>
+        <p:nvPr/>
+      </p:nvGrpSpPr>
+      <p:grpSpPr>
+        <a:xfrm>
+          <a:off x="0" y="0"/>
+          <a:ext cx="0" cy="0"/>
+          <a:chOff x="0" y="0"/>
+          <a:chExt cx="0" cy="0"/>
+        </a:xfrm>
+      </p:grpSpPr>
+      <p:sp>
+        <p:nvSpPr>
+          <p:cNvPr id="2" name="Title 1"/>
+          <p:cNvSpPr>
+            <a:spLocks noGrp="1"/>
+          </p:cNvSpPr>
+          <p:nvPr>
+            <p:ph type="title"/>
+          </p:nvPr>
+        </p:nvSpPr>
+        <p:spPr/>
+        <p:txBody>
+          <a:bodyPr/>
+          <a:lstStyle/>
+          <a:p>
+            <a:pPr lvl="0" indent="0" marL="0">
+              <a:buNone/>
+            </a:pPr>
+            <a:r>
+              <a:rPr/>
+              <a:t>Presentation &amp; the daily chain</a:t>
+            </a:r>
+          </a:p>
+        </p:txBody>
+      </p:sp>
+      <p:sp>
+        <p:nvSpPr>
+          <p:cNvPr id="3" name="Content Placeholder 2"/>
+          <p:cNvSpPr>
+            <a:spLocks noGrp="1"/>
+          </p:cNvSpPr>
+          <p:nvPr>
+            <p:ph idx="1"/>
+          </p:nvPr>
+        </p:nvSpPr>
+        <p:spPr/>
+        <p:txBody>
+          <a:bodyPr/>
+          <a:lstStyle/>
+          <a:p>
+            <a:pPr lvl="0" indent="0" marL="0">
+              <a:buNone/>
+            </a:pPr>
+            <a:r>
+              <a:rPr b="1"/>
+              <a:t>Surfaces:</a:t>
+            </a:r>
+            <a:r>
+              <a:rPr/>
+              <a:t> </a:t>
+            </a:r>
+            <a:r>
+              <a:rPr>
+                <a:latin typeface="Courier"/>
+              </a:rPr>
+              <a:t>wc2026_players.csv</a:t>
+            </a:r>
+            <a:r>
+              <a:rPr/>
+              <a:t>, </a:t>
+            </a:r>
+            <a:r>
+              <a:rPr>
+                <a:latin typeface="Courier"/>
+              </a:rPr>
+              <a:t>wc2026_team_assessment.csv</a:t>
+            </a:r>
+            <a:r>
+              <a:rPr/>
+              <a:t>; </a:t>
+            </a:r>
+            <a:r>
+              <a:rPr>
+                <a:latin typeface="Courier"/>
+              </a:rPr>
+              <a:t>docs/WINNERS.md</a:t>
+            </a:r>
+            <a:r>
+              <a:rPr/>
+              <a:t>, </a:t>
+            </a:r>
+            <a:r>
+              <a:rPr>
+                <a:latin typeface="Courier"/>
+              </a:rPr>
+              <a:t>CHAMPION_TRACKER.md</a:t>
+            </a:r>
+            <a:r>
+              <a:rPr/>
+              <a:t>, </a:t>
+            </a:r>
+            <a:r>
+              <a:rPr>
+                <a:latin typeface="Courier"/>
+              </a:rPr>
+              <a:t>FORECAST_LOG.md</a:t>
+            </a:r>
+            <a:r>
+              <a:rPr/>
+              <a:t>; </a:t>
+            </a:r>
+            <a:r>
+              <a:rPr>
+                <a:latin typeface="Courier"/>
+              </a:rPr>
+              <a:t>artifacts/*.png</a:t>
+            </a:r>
+            <a:r>
+              <a:rPr/>
+              <a:t> (calibration, champion timeline).</a:t>
+            </a:r>
+          </a:p>
+          <a:p>
+            <a:pPr lvl="0" indent="0">
+              <a:buNone/>
+            </a:pPr>
+            <a:r>
+              <a:rPr>
+                <a:latin typeface="Courier"/>
+              </a:rPr>
+              <a:t>make daily:
+  real-players -&gt; live-squads -&gt; live-features -&gt; real-fit -&gt; elo
+    -&gt; dataset(27) -&gt; winners(28) -&gt; track/champion -&gt; timeline -&gt; log</a:t>
+            </a:r>
+          </a:p>
+          <a:p>
+            <a:pPr lvl="0" indent="0" marL="0">
+              <a:buNone/>
+            </a:pPr>
+            <a:r>
+              <a:rPr/>
+              <a:t>Each run: fresh squads + results → recompute features/prior → refit → rebuild both tables → regenerate every forecast → the CI bot commits the diff.</a:t>
+            </a:r>
+          </a:p>
+        </p:txBody>
+      </p:sp>
+    </p:spTree>
+  </p:cSld>
+</p:sld>
+</file>
+
+<file path=ppt/slides/slide38.xml><?xml version="1.0" encoding="utf-8"?>
+<p:sld xmlns:a="http://schemas.openxmlformats.org/drawingml/2006/main" xmlns:r="http://schemas.openxmlformats.org/officeDocument/2006/relationships" xmlns:p="http://schemas.openxmlformats.org/presentationml/2006/main">
+  <p:cSld>
+    <p:spTree>
+      <p:nvGrpSpPr>
+        <p:cNvPr id="1" name=""/>
+        <p:cNvGrpSpPr/>
+        <p:nvPr/>
+      </p:nvGrpSpPr>
+      <p:grpSpPr>
+        <a:xfrm>
+          <a:off x="0" y="0"/>
+          <a:ext cx="0" cy="0"/>
+          <a:chOff x="0" y="0"/>
+          <a:chExt cx="0" cy="0"/>
+        </a:xfrm>
+      </p:grpSpPr>
+      <p:sp>
+        <p:nvSpPr>
+          <p:cNvPr id="2" name="Title 1"/>
+          <p:cNvSpPr>
+            <a:spLocks noGrp="1"/>
+          </p:cNvSpPr>
+          <p:nvPr>
+            <p:ph type="title"/>
+          </p:nvPr>
+        </p:nvSpPr>
+        <p:spPr/>
+        <p:txBody>
+          <a:bodyPr/>
+          <a:lstStyle/>
+          <a:p>
+            <a:pPr lvl="0" indent="0" marL="0">
+              <a:buNone/>
+            </a:pPr>
+            <a:r>
+              <a:rPr/>
+              <a:t>Extending it &amp; honest limits</a:t>
+            </a:r>
+          </a:p>
+        </p:txBody>
+      </p:sp>
+      <p:sp>
+        <p:nvSpPr>
+          <p:cNvPr id="3" name="Content Placeholder 2"/>
+          <p:cNvSpPr>
+            <a:spLocks noGrp="1"/>
+          </p:cNvSpPr>
+          <p:nvPr>
+            <p:ph idx="1"/>
+          </p:nvPr>
+        </p:nvSpPr>
+        <p:spPr/>
+        <p:txBody>
+          <a:bodyPr/>
+          <a:lstStyle/>
+          <a:p>
+            <a:pPr lvl="0"/>
+            <a:r>
+              <a:rPr b="1"/>
+              <a:t>Better attributes:</a:t>
+            </a:r>
+            <a:r>
+              <a:rPr/>
+              <a:t> replace the surname join with an exact-ID feed; the PLAYER schema (and everything downstream) is unchanged.</a:t>
+            </a:r>
+          </a:p>
+          <a:p>
+            <a:pPr lvl="0"/>
+            <a:r>
+              <a:rPr b="1"/>
+              <a:t>New prior signal:</a:t>
+            </a:r>
+            <a:r>
+              <a:rPr/>
+              <a:t> add a column in </a:t>
+            </a:r>
+            <a:r>
+              <a:rPr>
+                <a:latin typeface="Courier"/>
+              </a:rPr>
+              <a:t>live_team_features</a:t>
+            </a:r>
+            <a:r>
+              <a:rPr/>
+              <a:t>, fold it into </a:t>
+            </a:r>
+            <a:r>
+              <a:rPr>
+                <a:latin typeface="Courier"/>
+              </a:rPr>
+              <a:t>composite</a:t>
+            </a:r>
+            <a:r>
+              <a:rPr/>
+              <a:t> with a small weight, then </a:t>
+            </a:r>
+            <a:r>
+              <a:rPr b="1"/>
+              <a:t>validate on the RPS scoreboard</a:t>
+            </a:r>
+            <a:r>
+              <a:rPr/>
+              <a:t> — a feature stays only if it lowers RPS.</a:t>
+            </a:r>
+          </a:p>
+          <a:p>
+            <a:pPr lvl="0"/>
+            <a:r>
+              <a:rPr b="1"/>
+              <a:t>New source:</a:t>
+            </a:r>
+            <a:r>
+              <a:rPr/>
+              <a:t> add a loader returning a documented schema; wire aliases if names differ.</a:t>
+            </a:r>
+          </a:p>
+          <a:p>
+            <a:pPr lvl="0"/>
+            <a:r>
+              <a:rPr b="1"/>
+              <a:t>Limits:</a:t>
+            </a:r>
+            <a:r>
+              <a:rPr/>
+              <a:t> ~70% surname-join coverage (flagged), FIFA-22 vintage, results feed lags real time by hours.</a:t>
+            </a:r>
+          </a:p>
+        </p:txBody>
+      </p:sp>
+    </p:spTree>
+  </p:cSld>
+</p:sld>
+</file>
+
+<file path=ppt/slides/slide39.xml><?xml version="1.0" encoding="utf-8"?>
 <p:sld xmlns:a="http://schemas.openxmlformats.org/drawingml/2006/main" xmlns:r="http://schemas.openxmlformats.org/officeDocument/2006/relationships" xmlns:p="http://schemas.openxmlformats.org/presentationml/2006/main">
   <p:cSld>
     <p:spTree>
